--- a/ClassMaterials/SimpleObjects/Slides/Part3-Statics.pptx
+++ b/ClassMaterials/SimpleObjects/Slides/Part3-Statics.pptx
@@ -178,6 +178,22 @@
     </pc:docChg>
   </pc:docChgLst>
   <pc:docChgLst>
+    <pc:chgData name="Kelly, Jack" userId="S::kellyjc@rose-hulman.edu::a4fd8950-19f5-4a20-8ffc-645900257370" providerId="AD" clId="Web-{83FF7817-F08F-4973-9B88-C8C1006ED1BD}"/>
+    <pc:docChg chg="delSld">
+      <pc:chgData name="Kelly, Jack" userId="S::kellyjc@rose-hulman.edu::a4fd8950-19f5-4a20-8ffc-645900257370" providerId="AD" clId="Web-{83FF7817-F08F-4973-9B88-C8C1006ED1BD}" dt="2022-03-22T06:13:37.090" v="0"/>
+      <pc:docMkLst>
+        <pc:docMk/>
+      </pc:docMkLst>
+      <pc:sldChg chg="del">
+        <pc:chgData name="Kelly, Jack" userId="S::kellyjc@rose-hulman.edu::a4fd8950-19f5-4a20-8ffc-645900257370" providerId="AD" clId="Web-{83FF7817-F08F-4973-9B88-C8C1006ED1BD}" dt="2022-03-22T06:13:37.090" v="0"/>
+        <pc:sldMkLst>
+          <pc:docMk/>
+          <pc:sldMk cId="504009426" sldId="279"/>
+        </pc:sldMkLst>
+      </pc:sldChg>
+    </pc:docChg>
+  </pc:docChgLst>
+  <pc:docChgLst>
     <pc:chgData name="Hollingsworth, Joseph" userId="6338ef61-550f-4a52-a8a3-bd9025908f10" providerId="ADAL" clId="{8B56CC65-205A-F549-A661-F26F4F404A63}"/>
     <pc:docChg chg="modSld">
       <pc:chgData name="Hollingsworth, Joseph" userId="6338ef61-550f-4a52-a8a3-bd9025908f10" providerId="ADAL" clId="{8B56CC65-205A-F549-A661-F26F4F404A63}" dt="2022-03-15T12:39:56.529" v="69" actId="20577"/>
@@ -213,22 +229,6 @@
             <ac:spMk id="229" creationId="{00000000-0000-0000-0000-000000000000}"/>
           </ac:spMkLst>
         </pc:spChg>
-      </pc:sldChg>
-    </pc:docChg>
-  </pc:docChgLst>
-  <pc:docChgLst>
-    <pc:chgData name="Kelly, Jack" userId="S::kellyjc@rose-hulman.edu::a4fd8950-19f5-4a20-8ffc-645900257370" providerId="AD" clId="Web-{83FF7817-F08F-4973-9B88-C8C1006ED1BD}"/>
-    <pc:docChg chg="delSld">
-      <pc:chgData name="Kelly, Jack" userId="S::kellyjc@rose-hulman.edu::a4fd8950-19f5-4a20-8ffc-645900257370" providerId="AD" clId="Web-{83FF7817-F08F-4973-9B88-C8C1006ED1BD}" dt="2022-03-22T06:13:37.090" v="0"/>
-      <pc:docMkLst>
-        <pc:docMk/>
-      </pc:docMkLst>
-      <pc:sldChg chg="del">
-        <pc:chgData name="Kelly, Jack" userId="S::kellyjc@rose-hulman.edu::a4fd8950-19f5-4a20-8ffc-645900257370" providerId="AD" clId="Web-{83FF7817-F08F-4973-9B88-C8C1006ED1BD}" dt="2022-03-22T06:13:37.090" v="0"/>
-        <pc:sldMkLst>
-          <pc:docMk/>
-          <pc:sldMk cId="504009426" sldId="279"/>
-        </pc:sldMkLst>
       </pc:sldChg>
     </pc:docChg>
   </pc:docChgLst>
@@ -2257,7 +2257,7 @@
               <a:pPr>
                 <a:defRPr/>
               </a:pPr>
-              <a:t>Tuesday, March 18, 2025</a:t>
+              <a:t>Friday, September 11, 2026</a:t>
             </a:fld>
             <a:endParaRPr lang="en-US" dirty="0"/>
           </a:p>
@@ -2440,7 +2440,7 @@
               <a:pPr>
                 <a:defRPr/>
               </a:pPr>
-              <a:t>Tuesday, March 18, 2025</a:t>
+              <a:t>Friday, September 11, 2026</a:t>
             </a:fld>
             <a:endParaRPr lang="en-US" dirty="0"/>
           </a:p>
@@ -5208,7 +5208,7 @@
                 </a:uFill>
                 <a:latin typeface="Calibri"/>
               </a:rPr>
-              <a:t>on the </a:t>
+              <a:t>on </a:t>
             </a:r>
             <a:r>
               <a:rPr lang="en-US" sz="3200" b="0" strike="noStrike" spc="-1" dirty="0" err="1">
@@ -5316,44 +5316,6 @@
                 <a:latin typeface="Calibri"/>
               </a:rPr>
               <a:t>Fail in front of Instructor or TA -&gt; Now is the time to fail, not at 23:45 the night it is due</a:t>
-            </a:r>
-          </a:p>
-        </p:txBody>
-      </p:sp>
-      <p:sp>
-        <p:nvSpPr>
-          <p:cNvPr id="2" name="TextBox 1">
-            <a:extLst>
-              <a:ext uri="{FF2B5EF4-FFF2-40B4-BE49-F238E27FC236}">
-                <a16:creationId xmlns:a16="http://schemas.microsoft.com/office/drawing/2014/main" id="{019C6BA3-3175-9705-5787-DD22560E72CE}"/>
-              </a:ext>
-            </a:extLst>
-          </p:cNvPr>
-          <p:cNvSpPr txBox="1"/>
-          <p:nvPr/>
-        </p:nvSpPr>
-        <p:spPr>
-          <a:xfrm>
-            <a:off x="1398494" y="4873079"/>
-            <a:ext cx="5959737" cy="1446550"/>
-          </a:xfrm>
-          <a:prstGeom prst="rect">
-            <a:avLst/>
-          </a:prstGeom>
-          <a:solidFill>
-            <a:srgbClr val="92D050"/>
-          </a:solidFill>
-        </p:spPr>
-        <p:txBody>
-          <a:bodyPr wrap="square" rtlCol="0">
-            <a:spAutoFit/>
-          </a:bodyPr>
-          <a:lstStyle/>
-          <a:p>
-            <a:pPr algn="ctr"/>
-            <a:r>
-              <a:rPr lang="en-US" sz="4400" dirty="0"/>
-              <a:t>Review MS Team Channel for Pairings</a:t>
             </a:r>
           </a:p>
         </p:txBody>
@@ -8418,7 +8380,7 @@
           <a:p>
             <a:r>
               <a:rPr lang="en-US" dirty="0"/>
-              <a:t>In Eclipse</a:t>
+              <a:t>In IDE</a:t>
             </a:r>
           </a:p>
         </p:txBody>
@@ -11936,15 +11898,6 @@
 </file>
 
 <file path=customXml/item1.xml><?xml version="1.0" encoding="utf-8"?>
-<?mso-contentType ?>
-<FormTemplates xmlns="http://schemas.microsoft.com/sharepoint/v3/contenttype/forms">
-  <Display>DocumentLibraryForm</Display>
-  <Edit>DocumentLibraryForm</Edit>
-  <New>DocumentLibraryForm</New>
-</FormTemplates>
-</file>
-
-<file path=customXml/item2.xml><?xml version="1.0" encoding="utf-8"?>
 <ct:contentTypeSchema xmlns:ct="http://schemas.microsoft.com/office/2006/metadata/contentType" xmlns:ma="http://schemas.microsoft.com/office/2006/metadata/properties/metaAttributes" ct:_="" ma:_="" ma:contentTypeName="Document" ma:contentTypeID="0x0101004285D81DBE5F5A448E892B34D6B8CF20" ma:contentTypeVersion="8" ma:contentTypeDescription="Create a new document." ma:contentTypeScope="" ma:versionID="ecce54155d2ea7caa9aed06c8b6b9867">
   <xsd:schema xmlns:xsd="http://www.w3.org/2001/XMLSchema" xmlns:xs="http://www.w3.org/2001/XMLSchema" xmlns:p="http://schemas.microsoft.com/office/2006/metadata/properties" xmlns:ns2="08600313-7276-4ca7-b5d3-7d86193ee0ac" xmlns:ns3="820f9cb1-409d-4c4b-8197-1d4f7dd48124" targetNamespace="http://schemas.microsoft.com/office/2006/metadata/properties" ma:root="true" ma:fieldsID="bfd7385540b70b2fe84ac888cc214377" ns2:_="" ns3:_="">
     <xsd:import namespace="08600313-7276-4ca7-b5d3-7d86193ee0ac"/>
@@ -12121,6 +12074,15 @@
 </ct:contentTypeSchema>
 </file>
 
+<file path=customXml/item2.xml><?xml version="1.0" encoding="utf-8"?>
+<?mso-contentType ?>
+<FormTemplates xmlns="http://schemas.microsoft.com/sharepoint/v3/contenttype/forms">
+  <Display>DocumentLibraryForm</Display>
+  <Edit>DocumentLibraryForm</Edit>
+  <New>DocumentLibraryForm</New>
+</FormTemplates>
+</file>
+
 <file path=customXml/item3.xml><?xml version="1.0" encoding="utf-8"?>
 <p:properties xmlns:p="http://schemas.microsoft.com/office/2006/metadata/properties" xmlns:xsi="http://www.w3.org/2001/XMLSchema-instance" xmlns:pc="http://schemas.microsoft.com/office/infopath/2007/PartnerControls">
   <documentManagement>
@@ -12133,14 +12095,6 @@
 </file>
 
 <file path=customXml/itemProps1.xml><?xml version="1.0" encoding="utf-8"?>
-<ds:datastoreItem xmlns:ds="http://schemas.openxmlformats.org/officeDocument/2006/customXml" ds:itemID="{1F91A352-1F40-4259-97AC-634C68ED9050}">
-  <ds:schemaRefs>
-    <ds:schemaRef ds:uri="http://schemas.microsoft.com/sharepoint/v3/contenttype/forms"/>
-  </ds:schemaRefs>
-</ds:datastoreItem>
-</file>
-
-<file path=customXml/itemProps2.xml><?xml version="1.0" encoding="utf-8"?>
 <ds:datastoreItem xmlns:ds="http://schemas.openxmlformats.org/officeDocument/2006/customXml" ds:itemID="{19E38866-5CA2-442C-B776-5925AA69883F}">
   <ds:schemaRefs>
     <ds:schemaRef ds:uri="http://schemas.microsoft.com/office/2006/metadata/contentType"/>
@@ -12155,6 +12109,14 @@
     <ds:schemaRef ds:uri="http://purl.org/dc/elements/1.1/"/>
     <ds:schemaRef ds:uri="http://purl.org/dc/terms/"/>
     <ds:schemaRef ds:uri="http://schemas.microsoft.com/internal/obd"/>
+  </ds:schemaRefs>
+</ds:datastoreItem>
+</file>
+
+<file path=customXml/itemProps2.xml><?xml version="1.0" encoding="utf-8"?>
+<ds:datastoreItem xmlns:ds="http://schemas.openxmlformats.org/officeDocument/2006/customXml" ds:itemID="{1F91A352-1F40-4259-97AC-634C68ED9050}">
+  <ds:schemaRefs>
+    <ds:schemaRef ds:uri="http://schemas.microsoft.com/sharepoint/v3/contenttype/forms"/>
   </ds:schemaRefs>
 </ds:datastoreItem>
 </file>

--- a/ClassMaterials/SimpleObjects/Slides/Part3-Statics.pptx
+++ b/ClassMaterials/SimpleObjects/Slides/Part3-Statics.pptx
@@ -178,22 +178,6 @@
     </pc:docChg>
   </pc:docChgLst>
   <pc:docChgLst>
-    <pc:chgData name="Kelly, Jack" userId="S::kellyjc@rose-hulman.edu::a4fd8950-19f5-4a20-8ffc-645900257370" providerId="AD" clId="Web-{83FF7817-F08F-4973-9B88-C8C1006ED1BD}"/>
-    <pc:docChg chg="delSld">
-      <pc:chgData name="Kelly, Jack" userId="S::kellyjc@rose-hulman.edu::a4fd8950-19f5-4a20-8ffc-645900257370" providerId="AD" clId="Web-{83FF7817-F08F-4973-9B88-C8C1006ED1BD}" dt="2022-03-22T06:13:37.090" v="0"/>
-      <pc:docMkLst>
-        <pc:docMk/>
-      </pc:docMkLst>
-      <pc:sldChg chg="del">
-        <pc:chgData name="Kelly, Jack" userId="S::kellyjc@rose-hulman.edu::a4fd8950-19f5-4a20-8ffc-645900257370" providerId="AD" clId="Web-{83FF7817-F08F-4973-9B88-C8C1006ED1BD}" dt="2022-03-22T06:13:37.090" v="0"/>
-        <pc:sldMkLst>
-          <pc:docMk/>
-          <pc:sldMk cId="504009426" sldId="279"/>
-        </pc:sldMkLst>
-      </pc:sldChg>
-    </pc:docChg>
-  </pc:docChgLst>
-  <pc:docChgLst>
     <pc:chgData name="Hollingsworth, Joseph" userId="6338ef61-550f-4a52-a8a3-bd9025908f10" providerId="ADAL" clId="{8B56CC65-205A-F549-A661-F26F4F404A63}"/>
     <pc:docChg chg="modSld">
       <pc:chgData name="Hollingsworth, Joseph" userId="6338ef61-550f-4a52-a8a3-bd9025908f10" providerId="ADAL" clId="{8B56CC65-205A-F549-A661-F26F4F404A63}" dt="2022-03-15T12:39:56.529" v="69" actId="20577"/>
@@ -229,6 +213,22 @@
             <ac:spMk id="229" creationId="{00000000-0000-0000-0000-000000000000}"/>
           </ac:spMkLst>
         </pc:spChg>
+      </pc:sldChg>
+    </pc:docChg>
+  </pc:docChgLst>
+  <pc:docChgLst>
+    <pc:chgData name="Kelly, Jack" userId="S::kellyjc@rose-hulman.edu::a4fd8950-19f5-4a20-8ffc-645900257370" providerId="AD" clId="Web-{83FF7817-F08F-4973-9B88-C8C1006ED1BD}"/>
+    <pc:docChg chg="delSld">
+      <pc:chgData name="Kelly, Jack" userId="S::kellyjc@rose-hulman.edu::a4fd8950-19f5-4a20-8ffc-645900257370" providerId="AD" clId="Web-{83FF7817-F08F-4973-9B88-C8C1006ED1BD}" dt="2022-03-22T06:13:37.090" v="0"/>
+      <pc:docMkLst>
+        <pc:docMk/>
+      </pc:docMkLst>
+      <pc:sldChg chg="del">
+        <pc:chgData name="Kelly, Jack" userId="S::kellyjc@rose-hulman.edu::a4fd8950-19f5-4a20-8ffc-645900257370" providerId="AD" clId="Web-{83FF7817-F08F-4973-9B88-C8C1006ED1BD}" dt="2022-03-22T06:13:37.090" v="0"/>
+        <pc:sldMkLst>
+          <pc:docMk/>
+          <pc:sldMk cId="504009426" sldId="279"/>
+        </pc:sldMkLst>
       </pc:sldChg>
     </pc:docChg>
   </pc:docChgLst>
@@ -2257,7 +2257,7 @@
               <a:pPr>
                 <a:defRPr/>
               </a:pPr>
-              <a:t>Friday, September 11, 2026</a:t>
+              <a:t>Tuesday, September 15, 2026</a:t>
             </a:fld>
             <a:endParaRPr lang="en-US" dirty="0"/>
           </a:p>
@@ -2440,7 +2440,7 @@
               <a:pPr>
                 <a:defRPr/>
               </a:pPr>
-              <a:t>Friday, September 11, 2026</a:t>
+              <a:t>Tuesday, September 15, 2026</a:t>
             </a:fld>
             <a:endParaRPr lang="en-US" dirty="0"/>
           </a:p>
@@ -5315,8 +5315,84 @@
                 </a:uFill>
                 <a:latin typeface="Calibri"/>
               </a:rPr>
-              <a:t>Fail in front of Instructor or TA -&gt; Now is the time to fail, not at 23:45 the night it is due</a:t>
-            </a:r>
+              <a:t>“Fail” (make a mistake, and learn from it) </a:t>
+            </a:r>
+            <a:br>
+              <a:rPr lang="en-US" sz="3200" spc="-1" dirty="0">
+                <a:solidFill>
+                  <a:srgbClr val="000000"/>
+                </a:solidFill>
+                <a:uFill>
+                  <a:solidFill>
+                    <a:srgbClr val="FFFFFF"/>
+                  </a:solidFill>
+                </a:uFill>
+                <a:latin typeface="Calibri"/>
+              </a:rPr>
+            </a:br>
+            <a:r>
+              <a:rPr lang="en-US" sz="3200" b="0" strike="noStrike" spc="-1" dirty="0">
+                <a:solidFill>
+                  <a:srgbClr val="000000"/>
+                </a:solidFill>
+                <a:uFill>
+                  <a:solidFill>
+                    <a:srgbClr val="FFFFFF"/>
+                  </a:solidFill>
+                </a:uFill>
+                <a:latin typeface="Calibri"/>
+              </a:rPr>
+              <a:t>in front of Instructor or TA</a:t>
+            </a:r>
+          </a:p>
+          <a:p>
+            <a:pPr marL="800280" lvl="1" indent="-342720">
+              <a:buClr>
+                <a:srgbClr val="000000"/>
+              </a:buClr>
+              <a:buFont typeface="Arial"/>
+              <a:buChar char="•"/>
+            </a:pPr>
+            <a:r>
+              <a:rPr lang="en-US" sz="3200" b="0" strike="noStrike" spc="-1" dirty="0">
+                <a:solidFill>
+                  <a:srgbClr val="000000"/>
+                </a:solidFill>
+                <a:uFill>
+                  <a:solidFill>
+                    <a:srgbClr val="FFFFFF"/>
+                  </a:solidFill>
+                </a:uFill>
+                <a:latin typeface="Calibri"/>
+              </a:rPr>
+              <a:t>Now is the time to fail, not at 23:45 the night it is due </a:t>
+            </a:r>
+            <a:r>
+              <a:rPr lang="en-US" sz="3200" b="0" strike="noStrike" spc="-1" dirty="0">
+                <a:solidFill>
+                  <a:srgbClr val="000000"/>
+                </a:solidFill>
+                <a:uFill>
+                  <a:solidFill>
+                    <a:srgbClr val="FFFFFF"/>
+                  </a:solidFill>
+                </a:uFill>
+                <a:latin typeface="Calibri"/>
+                <a:sym typeface="Wingdings" panose="05000000000000000000" pitchFamily="2" charset="2"/>
+              </a:rPr>
+              <a:t></a:t>
+            </a:r>
+            <a:endParaRPr lang="en-US" sz="3200" b="0" strike="noStrike" spc="-1" dirty="0">
+              <a:solidFill>
+                <a:srgbClr val="000000"/>
+              </a:solidFill>
+              <a:uFill>
+                <a:solidFill>
+                  <a:srgbClr val="FFFFFF"/>
+                </a:solidFill>
+              </a:uFill>
+              <a:latin typeface="Calibri"/>
+            </a:endParaRPr>
           </a:p>
         </p:txBody>
       </p:sp>
@@ -8345,7 +8421,7 @@
 </file>
 
 <file path=ppt/slides/slide4.xml><?xml version="1.0" encoding="utf-8"?>
-<p:sld xmlns:a="http://schemas.openxmlformats.org/drawingml/2006/main" xmlns:r="http://schemas.openxmlformats.org/officeDocument/2006/relationships" xmlns:p="http://schemas.openxmlformats.org/presentationml/2006/main" show="0">
+<p:sld xmlns:a="http://schemas.openxmlformats.org/drawingml/2006/main" xmlns:r="http://schemas.openxmlformats.org/officeDocument/2006/relationships" xmlns:p="http://schemas.openxmlformats.org/presentationml/2006/main">
   <p:cSld>
     <p:spTree>
       <p:nvGrpSpPr>
@@ -11898,6 +11974,15 @@
 </file>
 
 <file path=customXml/item1.xml><?xml version="1.0" encoding="utf-8"?>
+<?mso-contentType ?>
+<FormTemplates xmlns="http://schemas.microsoft.com/sharepoint/v3/contenttype/forms">
+  <Display>DocumentLibraryForm</Display>
+  <Edit>DocumentLibraryForm</Edit>
+  <New>DocumentLibraryForm</New>
+</FormTemplates>
+</file>
+
+<file path=customXml/item2.xml><?xml version="1.0" encoding="utf-8"?>
 <ct:contentTypeSchema xmlns:ct="http://schemas.microsoft.com/office/2006/metadata/contentType" xmlns:ma="http://schemas.microsoft.com/office/2006/metadata/properties/metaAttributes" ct:_="" ma:_="" ma:contentTypeName="Document" ma:contentTypeID="0x0101004285D81DBE5F5A448E892B34D6B8CF20" ma:contentTypeVersion="8" ma:contentTypeDescription="Create a new document." ma:contentTypeScope="" ma:versionID="ecce54155d2ea7caa9aed06c8b6b9867">
   <xsd:schema xmlns:xsd="http://www.w3.org/2001/XMLSchema" xmlns:xs="http://www.w3.org/2001/XMLSchema" xmlns:p="http://schemas.microsoft.com/office/2006/metadata/properties" xmlns:ns2="08600313-7276-4ca7-b5d3-7d86193ee0ac" xmlns:ns3="820f9cb1-409d-4c4b-8197-1d4f7dd48124" targetNamespace="http://schemas.microsoft.com/office/2006/metadata/properties" ma:root="true" ma:fieldsID="bfd7385540b70b2fe84ac888cc214377" ns2:_="" ns3:_="">
     <xsd:import namespace="08600313-7276-4ca7-b5d3-7d86193ee0ac"/>
@@ -12074,15 +12159,6 @@
 </ct:contentTypeSchema>
 </file>
 
-<file path=customXml/item2.xml><?xml version="1.0" encoding="utf-8"?>
-<?mso-contentType ?>
-<FormTemplates xmlns="http://schemas.microsoft.com/sharepoint/v3/contenttype/forms">
-  <Display>DocumentLibraryForm</Display>
-  <Edit>DocumentLibraryForm</Edit>
-  <New>DocumentLibraryForm</New>
-</FormTemplates>
-</file>
-
 <file path=customXml/item3.xml><?xml version="1.0" encoding="utf-8"?>
 <p:properties xmlns:p="http://schemas.microsoft.com/office/2006/metadata/properties" xmlns:xsi="http://www.w3.org/2001/XMLSchema-instance" xmlns:pc="http://schemas.microsoft.com/office/infopath/2007/PartnerControls">
   <documentManagement>
@@ -12095,6 +12171,14 @@
 </file>
 
 <file path=customXml/itemProps1.xml><?xml version="1.0" encoding="utf-8"?>
+<ds:datastoreItem xmlns:ds="http://schemas.openxmlformats.org/officeDocument/2006/customXml" ds:itemID="{1F91A352-1F40-4259-97AC-634C68ED9050}">
+  <ds:schemaRefs>
+    <ds:schemaRef ds:uri="http://schemas.microsoft.com/sharepoint/v3/contenttype/forms"/>
+  </ds:schemaRefs>
+</ds:datastoreItem>
+</file>
+
+<file path=customXml/itemProps2.xml><?xml version="1.0" encoding="utf-8"?>
 <ds:datastoreItem xmlns:ds="http://schemas.openxmlformats.org/officeDocument/2006/customXml" ds:itemID="{19E38866-5CA2-442C-B776-5925AA69883F}">
   <ds:schemaRefs>
     <ds:schemaRef ds:uri="http://schemas.microsoft.com/office/2006/metadata/contentType"/>
@@ -12109,14 +12193,6 @@
     <ds:schemaRef ds:uri="http://purl.org/dc/elements/1.1/"/>
     <ds:schemaRef ds:uri="http://purl.org/dc/terms/"/>
     <ds:schemaRef ds:uri="http://schemas.microsoft.com/internal/obd"/>
-  </ds:schemaRefs>
-</ds:datastoreItem>
-</file>
-
-<file path=customXml/itemProps2.xml><?xml version="1.0" encoding="utf-8"?>
-<ds:datastoreItem xmlns:ds="http://schemas.openxmlformats.org/officeDocument/2006/customXml" ds:itemID="{1F91A352-1F40-4259-97AC-634C68ED9050}">
-  <ds:schemaRefs>
-    <ds:schemaRef ds:uri="http://schemas.microsoft.com/sharepoint/v3/contenttype/forms"/>
   </ds:schemaRefs>
 </ds:datastoreItem>
 </file>
